--- a/docs/figures/class_figure.pptx
+++ b/docs/figures/class_figure.pptx
@@ -4809,7 +4809,7 @@
                   <a:srgbClr val="C00000"/>
                 </a:solidFill>
               </a:rPr>
-              <a:t>:radiationType</a:t>
+              <a:t>:hasRadiationType</a:t>
             </a:r>
           </a:p>
         </p:txBody>
@@ -4953,7 +4953,7 @@
                   <a:srgbClr val="C00000"/>
                 </a:solidFill>
               </a:rPr>
-              <a:t>:decayProduct</a:t>
+              <a:t>:hasDecayProduct</a:t>
             </a:r>
           </a:p>
         </p:txBody>
@@ -5025,7 +5025,7 @@
                   <a:srgbClr val="C00000"/>
                 </a:solidFill>
               </a:rPr>
-              <a:t>:decayMode</a:t>
+              <a:t>:hasDecayMode</a:t>
             </a:r>
           </a:p>
         </p:txBody>
